--- a/dist/초3/영어/소리와문자/초3_영어_소리와문자_01_알파벳A부터M까지_학생용.pptx
+++ b/dist/초3/영어/소리와문자/초3_영어_소리와문자_01_알파벳A부터M까지_학생용.pptx
@@ -122,13 +122,13 @@
   <p:extLst>
     <p:ext uri="{521415D9-36F7-43E2-AB2F-B90AF26B5E84}">
       <p14:sectionLst xmlns:p14="http://schemas.microsoft.com/office/powerpoint/2010/main">
-        <p14:section name="도입" id="{f1e51760-2130-41a9-3b59-4fb19239398c}">
+        <p14:section name="도입" id="{11212f83-5a4f-2914-d615-d858b28b8114}">
           <p14:sldIdLst>
             <p14:sldId id="256"/>
             <p14:sldId id="257"/>
           </p14:sldIdLst>
         </p14:section>
-        <p14:section name="개념" id="{f8e5b139-f209-0461-094f-071639f56ca2}">
+        <p14:section name="개념" id="{76d6de49-3420-26c7-60a7-a4459d58dda5}">
           <p14:sldIdLst>
             <p14:sldId id="258"/>
             <p14:sldId id="259"/>
@@ -139,25 +139,25 @@
             <p14:sldId id="264"/>
           </p14:sldIdLst>
         </p14:section>
-        <p14:section name="연습" id="{5cc7c346-abb4-e784-a683-e6fc7ee879d4}">
+        <p14:section name="연습" id="{05f338f6-c790-c99b-ef69-474df9167901}">
           <p14:sldIdLst>
             <p14:sldId id="265"/>
             <p14:sldId id="266"/>
             <p14:sldId id="267"/>
           </p14:sldIdLst>
         </p14:section>
-        <p14:section name="확인" id="{13ec36b9-6c85-b3d5-e4ad-380338711039}">
+        <p14:section name="확인" id="{3eb6bd26-f93c-f9e5-1104-8bf142f1c080}">
           <p14:sldIdLst>
             <p14:sldId id="268"/>
             <p14:sldId id="269"/>
           </p14:sldIdLst>
         </p14:section>
-        <p14:section name="정리" id="{a000ff1d-6c63-71a8-3723-07d1d17b3ed0}">
+        <p14:section name="정리" id="{4e6b7500-6539-4ae0-c27d-e7eb5d7808ec}">
           <p14:sldIdLst>
             <p14:sldId id="270"/>
           </p14:sldIdLst>
         </p14:section>
-        <p14:section name="보충" id="{0f68b969-fd52-cd1d-e8d1-106aab5969c1}">
+        <p14:section name="보충" id="{925a3fdc-bf51-5de5-cba0-8eeb11344ce1}">
           <p14:sldIdLst>
             <p14:sldId id="271"/>
           </p14:sldIdLst>
@@ -3074,7 +3074,7 @@
               <a:buNone/>
             </a:pPr>
             <a:r>
-              <a:rPr lang="ko-KR" altLang="en-US" sz="5900" b="1" dirty="0">
+              <a:rPr lang="en-US" altLang="ko-KR" sz="5900" b="1" dirty="0">
                 <a:solidFill>
                   <a:srgbClr val="1F2937"/>
                 </a:solidFill>
@@ -3121,7 +3121,7 @@
               <a:buNone/>
             </a:pPr>
             <a:r>
-              <a:rPr lang="ko-KR" altLang="en-US" sz="5900" b="1" dirty="0">
+              <a:rPr lang="en-US" altLang="ko-KR" sz="5900" b="1" dirty="0">
                 <a:solidFill>
                   <a:srgbClr val="1F2937"/>
                 </a:solidFill>
@@ -3168,7 +3168,7 @@
               <a:buNone/>
             </a:pPr>
             <a:r>
-              <a:rPr lang="ko-KR" altLang="en-US" sz="5900" b="1" dirty="0">
+              <a:rPr lang="en-US" altLang="ko-KR" sz="5900" b="1" dirty="0">
                 <a:solidFill>
                   <a:srgbClr val="1F2937"/>
                 </a:solidFill>
@@ -3215,7 +3215,7 @@
               <a:buNone/>
             </a:pPr>
             <a:r>
-              <a:rPr lang="ko-KR" altLang="en-US" sz="5900" b="1" dirty="0">
+              <a:rPr lang="en-US" altLang="ko-KR" sz="5900" b="1" dirty="0">
                 <a:solidFill>
                   <a:srgbClr val="1F2937"/>
                 </a:solidFill>
@@ -3476,7 +3476,7 @@
               <a:buNone/>
             </a:pPr>
             <a:r>
-              <a:rPr lang="ko-KR" altLang="en-US" sz="5900" b="1" dirty="0">
+              <a:rPr lang="en-US" altLang="ko-KR" sz="5900" b="1" dirty="0">
                 <a:solidFill>
                   <a:srgbClr val="1F2937"/>
                 </a:solidFill>
@@ -3523,7 +3523,7 @@
               <a:buNone/>
             </a:pPr>
             <a:r>
-              <a:rPr lang="ko-KR" altLang="en-US" sz="5900" b="1" dirty="0">
+              <a:rPr lang="en-US" altLang="ko-KR" sz="5900" b="1" dirty="0">
                 <a:solidFill>
                   <a:srgbClr val="1F2937"/>
                 </a:solidFill>
@@ -3570,7 +3570,7 @@
               <a:buNone/>
             </a:pPr>
             <a:r>
-              <a:rPr lang="ko-KR" altLang="en-US" sz="5900" b="1" dirty="0">
+              <a:rPr lang="en-US" altLang="ko-KR" sz="5900" b="1" dirty="0">
                 <a:solidFill>
                   <a:srgbClr val="1F2937"/>
                 </a:solidFill>
@@ -3617,7 +3617,7 @@
               <a:buNone/>
             </a:pPr>
             <a:r>
-              <a:rPr lang="ko-KR" altLang="en-US" sz="5900" b="1" dirty="0">
+              <a:rPr lang="en-US" altLang="ko-KR" sz="5900" b="1" dirty="0">
                 <a:solidFill>
                   <a:srgbClr val="1F2937"/>
                 </a:solidFill>
@@ -3664,7 +3664,7 @@
               <a:buNone/>
             </a:pPr>
             <a:r>
-              <a:rPr lang="ko-KR" altLang="en-US" sz="5900" b="1" dirty="0">
+              <a:rPr lang="en-US" altLang="ko-KR" sz="5900" b="1" dirty="0">
                 <a:solidFill>
                   <a:srgbClr val="1F2937"/>
                 </a:solidFill>
@@ -3711,7 +3711,7 @@
               <a:buNone/>
             </a:pPr>
             <a:r>
-              <a:rPr lang="ko-KR" altLang="en-US" sz="5900" b="1" dirty="0">
+              <a:rPr lang="en-US" altLang="ko-KR" sz="5900" b="1" dirty="0">
                 <a:solidFill>
                   <a:srgbClr val="1F2937"/>
                 </a:solidFill>
@@ -3758,7 +3758,7 @@
               <a:buNone/>
             </a:pPr>
             <a:r>
-              <a:rPr lang="ko-KR" altLang="en-US" sz="5900" b="1" dirty="0">
+              <a:rPr lang="en-US" altLang="ko-KR" sz="5900" b="1" dirty="0">
                 <a:solidFill>
                   <a:srgbClr val="1F2937"/>
                 </a:solidFill>
@@ -3805,7 +3805,7 @@
               <a:buNone/>
             </a:pPr>
             <a:r>
-              <a:rPr lang="ko-KR" altLang="en-US" sz="5900" b="1" dirty="0">
+              <a:rPr lang="en-US" altLang="ko-KR" sz="5900" b="1" dirty="0">
                 <a:solidFill>
                   <a:srgbClr val="1F2937"/>
                 </a:solidFill>
@@ -3852,7 +3852,7 @@
               <a:buNone/>
             </a:pPr>
             <a:r>
-              <a:rPr lang="ko-KR" altLang="en-US" sz="5900" b="1" dirty="0">
+              <a:rPr lang="en-US" altLang="ko-KR" sz="5900" b="1" dirty="0">
                 <a:solidFill>
                   <a:srgbClr val="1F2937"/>
                 </a:solidFill>
@@ -3899,7 +3899,7 @@
               <a:buNone/>
             </a:pPr>
             <a:r>
-              <a:rPr lang="ko-KR" altLang="en-US" sz="5900" b="1" dirty="0">
+              <a:rPr lang="en-US" altLang="ko-KR" sz="5900" b="1" dirty="0">
                 <a:solidFill>
                   <a:srgbClr val="1F2937"/>
                 </a:solidFill>
@@ -3946,7 +3946,7 @@
               <a:buNone/>
             </a:pPr>
             <a:r>
-              <a:rPr lang="ko-KR" altLang="en-US" sz="5900" b="1" dirty="0">
+              <a:rPr lang="en-US" altLang="ko-KR" sz="5900" b="1" dirty="0">
                 <a:solidFill>
                   <a:srgbClr val="1F2937"/>
                 </a:solidFill>
@@ -3993,7 +3993,7 @@
               <a:buNone/>
             </a:pPr>
             <a:r>
-              <a:rPr lang="ko-KR" altLang="en-US" sz="5900" b="1" dirty="0">
+              <a:rPr lang="en-US" altLang="ko-KR" sz="5900" b="1" dirty="0">
                 <a:solidFill>
                   <a:srgbClr val="1F2937"/>
                 </a:solidFill>
@@ -4040,7 +4040,7 @@
               <a:buNone/>
             </a:pPr>
             <a:r>
-              <a:rPr lang="ko-KR" altLang="en-US" sz="5900" b="1" dirty="0">
+              <a:rPr lang="en-US" altLang="ko-KR" sz="5900" b="1" dirty="0">
                 <a:solidFill>
                   <a:srgbClr val="1F2937"/>
                 </a:solidFill>
@@ -4386,7 +4386,7 @@
               <a:buNone/>
             </a:pPr>
             <a:r>
-              <a:rPr lang="ko-KR" altLang="en-US" sz="5900" b="1" dirty="0">
+              <a:rPr lang="en-US" altLang="ko-KR" sz="5900" b="1" dirty="0">
                 <a:solidFill>
                   <a:srgbClr val="1F2937"/>
                 </a:solidFill>
@@ -4480,7 +4480,7 @@
               <a:buNone/>
             </a:pPr>
             <a:r>
-              <a:rPr lang="ko-KR" altLang="en-US" sz="5900" b="1" dirty="0">
+              <a:rPr lang="en-US" altLang="ko-KR" sz="5900" b="1" dirty="0">
                 <a:solidFill>
                   <a:srgbClr val="1F2937"/>
                 </a:solidFill>
@@ -4796,7 +4796,7 @@
               <a:buNone/>
             </a:pPr>
             <a:r>
-              <a:rPr lang="ko-KR" altLang="en-US" sz="4000" b="1" dirty="0">
+              <a:rPr lang="en-US" altLang="ko-KR" sz="4000" b="1" dirty="0">
                 <a:solidFill>
                   <a:srgbClr val="1F2937"/>
                 </a:solidFill>
@@ -4843,7 +4843,7 @@
               <a:buNone/>
             </a:pPr>
             <a:r>
-              <a:rPr lang="ko-KR" altLang="en-US" sz="4000" b="1" dirty="0">
+              <a:rPr lang="en-US" altLang="ko-KR" sz="4000" b="1" dirty="0">
                 <a:solidFill>
                   <a:srgbClr val="1F2937"/>
                 </a:solidFill>
@@ -4937,7 +4937,7 @@
               <a:buNone/>
             </a:pPr>
             <a:r>
-              <a:rPr lang="ko-KR" altLang="en-US" sz="4000" b="1" dirty="0">
+              <a:rPr lang="en-US" altLang="ko-KR" sz="4000" b="1" dirty="0">
                 <a:solidFill>
                   <a:srgbClr val="1F2937"/>
                 </a:solidFill>
@@ -5031,7 +5031,7 @@
               <a:buNone/>
             </a:pPr>
             <a:r>
-              <a:rPr lang="ko-KR" altLang="en-US" sz="4000" b="1" dirty="0">
+              <a:rPr lang="en-US" altLang="ko-KR" sz="4000" b="1" dirty="0">
                 <a:solidFill>
                   <a:srgbClr val="1F2937"/>
                 </a:solidFill>
@@ -5078,7 +5078,7 @@
               <a:buNone/>
             </a:pPr>
             <a:r>
-              <a:rPr lang="ko-KR" altLang="en-US" sz="4000" b="1" dirty="0">
+              <a:rPr lang="en-US" altLang="ko-KR" sz="4000" b="1" dirty="0">
                 <a:solidFill>
                   <a:srgbClr val="1F2937"/>
                 </a:solidFill>
@@ -5172,7 +5172,7 @@
               <a:buNone/>
             </a:pPr>
             <a:r>
-              <a:rPr lang="ko-KR" altLang="en-US" sz="4000" b="1" dirty="0">
+              <a:rPr lang="en-US" altLang="ko-KR" sz="4000" b="1" dirty="0">
                 <a:solidFill>
                   <a:srgbClr val="1F2937"/>
                 </a:solidFill>
@@ -5313,7 +5313,7 @@
               <a:buNone/>
             </a:pPr>
             <a:r>
-              <a:rPr lang="ko-KR" altLang="en-US" sz="4000" b="1" dirty="0">
+              <a:rPr lang="en-US" altLang="ko-KR" sz="4000" b="1" dirty="0">
                 <a:solidFill>
                   <a:srgbClr val="1F2937"/>
                 </a:solidFill>
@@ -5360,7 +5360,7 @@
               <a:buNone/>
             </a:pPr>
             <a:r>
-              <a:rPr lang="ko-KR" altLang="en-US" sz="4000" b="1" dirty="0">
+              <a:rPr lang="en-US" altLang="ko-KR" sz="4000" b="1" dirty="0">
                 <a:solidFill>
                   <a:srgbClr val="1F2937"/>
                 </a:solidFill>
@@ -5407,7 +5407,7 @@
               <a:buNone/>
             </a:pPr>
             <a:r>
-              <a:rPr lang="ko-KR" altLang="en-US" sz="4000" b="1" dirty="0">
+              <a:rPr lang="en-US" altLang="ko-KR" sz="4000" b="1" dirty="0">
                 <a:solidFill>
                   <a:srgbClr val="1F2937"/>
                 </a:solidFill>
@@ -5654,7 +5654,7 @@
               <a:buNone/>
             </a:pPr>
             <a:r>
-              <a:rPr lang="ko-KR" altLang="en-US" sz="5900" b="1" dirty="0">
+              <a:rPr lang="en-US" altLang="ko-KR" sz="5900" b="1" dirty="0">
                 <a:solidFill>
                   <a:srgbClr val="1F2937"/>
                 </a:solidFill>
@@ -5701,7 +5701,7 @@
               <a:buNone/>
             </a:pPr>
             <a:r>
-              <a:rPr lang="ko-KR" altLang="en-US" sz="5900" b="1" dirty="0">
+              <a:rPr lang="en-US" altLang="ko-KR" sz="5900" b="1" dirty="0">
                 <a:solidFill>
                   <a:srgbClr val="1F2937"/>
                 </a:solidFill>
@@ -5748,7 +5748,7 @@
               <a:buNone/>
             </a:pPr>
             <a:r>
-              <a:rPr lang="ko-KR" altLang="en-US" sz="5900" b="1" dirty="0">
+              <a:rPr lang="en-US" altLang="ko-KR" sz="5900" b="1" dirty="0">
                 <a:solidFill>
                   <a:srgbClr val="1F2937"/>
                 </a:solidFill>
@@ -5842,7 +5842,7 @@
               <a:buNone/>
             </a:pPr>
             <a:r>
-              <a:rPr lang="ko-KR" altLang="en-US" sz="5900" b="1" dirty="0">
+              <a:rPr lang="en-US" altLang="ko-KR" sz="5900" b="1" dirty="0">
                 <a:solidFill>
                   <a:srgbClr val="1F2937"/>
                 </a:solidFill>
@@ -5889,7 +5889,7 @@
               <a:buNone/>
             </a:pPr>
             <a:r>
-              <a:rPr lang="ko-KR" altLang="en-US" sz="5900" b="1" dirty="0">
+              <a:rPr lang="en-US" altLang="ko-KR" sz="5900" b="1" dirty="0">
                 <a:solidFill>
                   <a:srgbClr val="1F2937"/>
                 </a:solidFill>
@@ -5936,7 +5936,7 @@
               <a:buNone/>
             </a:pPr>
             <a:r>
-              <a:rPr lang="ko-KR" altLang="en-US" sz="5900" b="1" dirty="0">
+              <a:rPr lang="en-US" altLang="ko-KR" sz="5900" b="1" dirty="0">
                 <a:solidFill>
                   <a:srgbClr val="1F2937"/>
                 </a:solidFill>
@@ -6030,7 +6030,7 @@
               <a:buNone/>
             </a:pPr>
             <a:r>
-              <a:rPr lang="ko-KR" altLang="en-US" sz="5900" b="1" dirty="0">
+              <a:rPr lang="en-US" altLang="ko-KR" sz="5900" b="1" dirty="0">
                 <a:solidFill>
                   <a:srgbClr val="1F2937"/>
                 </a:solidFill>
@@ -6124,7 +6124,7 @@
               <a:buNone/>
             </a:pPr>
             <a:r>
-              <a:rPr lang="ko-KR" altLang="en-US" sz="5900" b="1" dirty="0">
+              <a:rPr lang="en-US" altLang="ko-KR" sz="5900" b="1" dirty="0">
                 <a:solidFill>
                   <a:srgbClr val="1F2937"/>
                 </a:solidFill>
@@ -6218,7 +6218,7 @@
               <a:buNone/>
             </a:pPr>
             <a:r>
-              <a:rPr lang="ko-KR" altLang="en-US" sz="5900" b="1" dirty="0">
+              <a:rPr lang="en-US" altLang="ko-KR" sz="5900" b="1" dirty="0">
                 <a:solidFill>
                   <a:srgbClr val="1F2937"/>
                 </a:solidFill>
@@ -6265,7 +6265,7 @@
               <a:buNone/>
             </a:pPr>
             <a:r>
-              <a:rPr lang="ko-KR" altLang="en-US" sz="5900" b="1" dirty="0">
+              <a:rPr lang="en-US" altLang="ko-KR" sz="5900" b="1" dirty="0">
                 <a:solidFill>
                   <a:srgbClr val="1F2937"/>
                 </a:solidFill>
@@ -6312,7 +6312,7 @@
               <a:buNone/>
             </a:pPr>
             <a:r>
-              <a:rPr lang="ko-KR" altLang="en-US" sz="5900" b="1" dirty="0">
+              <a:rPr lang="en-US" altLang="ko-KR" sz="5900" b="1" dirty="0">
                 <a:solidFill>
                   <a:srgbClr val="1F2937"/>
                 </a:solidFill>
@@ -6589,7 +6589,7 @@
               <a:buNone/>
             </a:pPr>
             <a:r>
-              <a:rPr lang="ko-KR" altLang="en-US" sz="6300" b="1" dirty="0">
+              <a:rPr lang="en-US" altLang="ko-KR" sz="6300" b="1" dirty="0">
                 <a:solidFill>
                   <a:srgbClr val="1F2937"/>
                 </a:solidFill>
@@ -6683,7 +6683,7 @@
               <a:buNone/>
             </a:pPr>
             <a:r>
-              <a:rPr lang="ko-KR" altLang="en-US" sz="6300" b="1" dirty="0">
+              <a:rPr lang="en-US" altLang="ko-KR" sz="6300" b="1" dirty="0">
                 <a:solidFill>
                   <a:srgbClr val="1F2937"/>
                 </a:solidFill>
@@ -6777,7 +6777,7 @@
               <a:buNone/>
             </a:pPr>
             <a:r>
-              <a:rPr lang="ko-KR" altLang="en-US" sz="6300" b="1" dirty="0">
+              <a:rPr lang="en-US" altLang="ko-KR" sz="6300" b="1" dirty="0">
                 <a:solidFill>
                   <a:srgbClr val="1F2937"/>
                 </a:solidFill>
@@ -6871,7 +6871,7 @@
               <a:buNone/>
             </a:pPr>
             <a:r>
-              <a:rPr lang="ko-KR" altLang="en-US" sz="6300" b="1" dirty="0">
+              <a:rPr lang="en-US" altLang="ko-KR" sz="6300" b="1" dirty="0">
                 <a:solidFill>
                   <a:srgbClr val="1F2937"/>
                 </a:solidFill>
@@ -8665,7 +8665,7 @@
               <a:buNone/>
             </a:pPr>
             <a:r>
-              <a:rPr lang="ko-KR" altLang="en-US" sz="8700" b="1" dirty="0">
+              <a:rPr lang="en-US" altLang="ko-KR" sz="8700" b="1" dirty="0">
                 <a:solidFill>
                   <a:srgbClr val="1F2937"/>
                 </a:solidFill>
@@ -8712,7 +8712,7 @@
               <a:buNone/>
             </a:pPr>
             <a:r>
-              <a:rPr lang="ko-KR" altLang="en-US" sz="8700" b="1" dirty="0">
+              <a:rPr lang="en-US" altLang="ko-KR" sz="8700" b="1" dirty="0">
                 <a:solidFill>
                   <a:srgbClr val="1F2937"/>
                 </a:solidFill>
@@ -9011,7 +9011,7 @@
               <a:buNone/>
             </a:pPr>
             <a:r>
-              <a:rPr lang="ko-KR" altLang="en-US" sz="8700" b="1" dirty="0">
+              <a:rPr lang="en-US" altLang="ko-KR" sz="8700" b="1" dirty="0">
                 <a:solidFill>
                   <a:srgbClr val="1F2937"/>
                 </a:solidFill>
@@ -9058,7 +9058,7 @@
               <a:buNone/>
             </a:pPr>
             <a:r>
-              <a:rPr lang="ko-KR" altLang="en-US" sz="8700" b="1" dirty="0">
+              <a:rPr lang="en-US" altLang="ko-KR" sz="8700" b="1" dirty="0">
                 <a:solidFill>
                   <a:srgbClr val="1F2937"/>
                 </a:solidFill>
@@ -9357,7 +9357,7 @@
               <a:buNone/>
             </a:pPr>
             <a:r>
-              <a:rPr lang="ko-KR" altLang="en-US" sz="8700" b="1" dirty="0">
+              <a:rPr lang="en-US" altLang="ko-KR" sz="8700" b="1" dirty="0">
                 <a:solidFill>
                   <a:srgbClr val="1F2937"/>
                 </a:solidFill>
@@ -9404,7 +9404,7 @@
               <a:buNone/>
             </a:pPr>
             <a:r>
-              <a:rPr lang="ko-KR" altLang="en-US" sz="8700" b="1" dirty="0">
+              <a:rPr lang="en-US" altLang="ko-KR" sz="8700" b="1" dirty="0">
                 <a:solidFill>
                   <a:srgbClr val="1F2937"/>
                 </a:solidFill>
@@ -9703,7 +9703,7 @@
               <a:buNone/>
             </a:pPr>
             <a:r>
-              <a:rPr lang="ko-KR" altLang="en-US" sz="8700" b="1" dirty="0">
+              <a:rPr lang="en-US" altLang="ko-KR" sz="8700" b="1" dirty="0">
                 <a:solidFill>
                   <a:srgbClr val="1F2937"/>
                 </a:solidFill>
@@ -9750,7 +9750,7 @@
               <a:buNone/>
             </a:pPr>
             <a:r>
-              <a:rPr lang="ko-KR" altLang="en-US" sz="8700" b="1" dirty="0">
+              <a:rPr lang="en-US" altLang="ko-KR" sz="8700" b="1" dirty="0">
                 <a:solidFill>
                   <a:srgbClr val="1F2937"/>
                 </a:solidFill>
@@ -10118,7 +10118,7 @@
               <a:buNone/>
             </a:pPr>
             <a:r>
-              <a:rPr lang="ko-KR" altLang="en-US" sz="7900" b="1" dirty="0">
+              <a:rPr lang="en-US" altLang="ko-KR" sz="7900" b="1" dirty="0">
                 <a:solidFill>
                   <a:srgbClr val="1F2937"/>
                 </a:solidFill>
@@ -10165,7 +10165,7 @@
               <a:buNone/>
             </a:pPr>
             <a:r>
-              <a:rPr lang="ko-KR" altLang="en-US" sz="7900" b="1" dirty="0">
+              <a:rPr lang="en-US" altLang="ko-KR" sz="7900" b="1" dirty="0">
                 <a:solidFill>
                   <a:srgbClr val="1F2937"/>
                 </a:solidFill>
@@ -10533,7 +10533,7 @@
               <a:buNone/>
             </a:pPr>
             <a:r>
-              <a:rPr lang="ko-KR" altLang="en-US" sz="7900" b="1" dirty="0">
+              <a:rPr lang="en-US" altLang="ko-KR" sz="7900" b="1" dirty="0">
                 <a:solidFill>
                   <a:srgbClr val="1F2937"/>
                 </a:solidFill>
@@ -10580,7 +10580,7 @@
               <a:buNone/>
             </a:pPr>
             <a:r>
-              <a:rPr lang="ko-KR" altLang="en-US" sz="7900" b="1" dirty="0">
+              <a:rPr lang="en-US" altLang="ko-KR" sz="7900" b="1" dirty="0">
                 <a:solidFill>
                   <a:srgbClr val="1F2937"/>
                 </a:solidFill>
@@ -10849,7 +10849,7 @@
               <a:buNone/>
             </a:pPr>
             <a:r>
-              <a:rPr lang="ko-KR" altLang="en-US" sz="5900" b="1" dirty="0">
+              <a:rPr lang="en-US" altLang="ko-KR" sz="5900" b="1" dirty="0">
                 <a:solidFill>
                   <a:srgbClr val="1F2937"/>
                 </a:solidFill>
@@ -10896,7 +10896,7 @@
               <a:buNone/>
             </a:pPr>
             <a:r>
-              <a:rPr lang="ko-KR" altLang="en-US" sz="5900" b="1" dirty="0">
+              <a:rPr lang="en-US" altLang="ko-KR" sz="5900" b="1" dirty="0">
                 <a:solidFill>
                   <a:srgbClr val="1F2937"/>
                 </a:solidFill>
@@ -10943,7 +10943,7 @@
               <a:buNone/>
             </a:pPr>
             <a:r>
-              <a:rPr lang="ko-KR" altLang="en-US" sz="5900" b="1" dirty="0">
+              <a:rPr lang="en-US" altLang="ko-KR" sz="5900" b="1" dirty="0">
                 <a:solidFill>
                   <a:srgbClr val="1F2937"/>
                 </a:solidFill>
@@ -10990,7 +10990,7 @@
               <a:buNone/>
             </a:pPr>
             <a:r>
-              <a:rPr lang="ko-KR" altLang="en-US" sz="5900" b="1" dirty="0">
+              <a:rPr lang="en-US" altLang="ko-KR" sz="5900" b="1" dirty="0">
                 <a:solidFill>
                   <a:srgbClr val="1F2937"/>
                 </a:solidFill>
@@ -11037,7 +11037,7 @@
               <a:buNone/>
             </a:pPr>
             <a:r>
-              <a:rPr lang="ko-KR" altLang="en-US" sz="5900" b="1" dirty="0">
+              <a:rPr lang="en-US" altLang="ko-KR" sz="5900" b="1" dirty="0">
                 <a:solidFill>
                   <a:srgbClr val="1F2937"/>
                 </a:solidFill>
@@ -11084,7 +11084,7 @@
               <a:buNone/>
             </a:pPr>
             <a:r>
-              <a:rPr lang="ko-KR" altLang="en-US" sz="5900" b="1" dirty="0">
+              <a:rPr lang="en-US" altLang="ko-KR" sz="5900" b="1" dirty="0">
                 <a:solidFill>
                   <a:srgbClr val="1F2937"/>
                 </a:solidFill>
@@ -11131,7 +11131,7 @@
               <a:buNone/>
             </a:pPr>
             <a:r>
-              <a:rPr lang="ko-KR" altLang="en-US" sz="5900" b="1" dirty="0">
+              <a:rPr lang="en-US" altLang="ko-KR" sz="5900" b="1" dirty="0">
                 <a:solidFill>
                   <a:srgbClr val="1F2937"/>
                 </a:solidFill>
@@ -11178,7 +11178,7 @@
               <a:buNone/>
             </a:pPr>
             <a:r>
-              <a:rPr lang="ko-KR" altLang="en-US" sz="5900" b="1" dirty="0">
+              <a:rPr lang="en-US" altLang="ko-KR" sz="5900" b="1" dirty="0">
                 <a:solidFill>
                   <a:srgbClr val="1F2937"/>
                 </a:solidFill>
@@ -11225,7 +11225,7 @@
               <a:buNone/>
             </a:pPr>
             <a:r>
-              <a:rPr lang="ko-KR" altLang="en-US" sz="5900" b="1" dirty="0">
+              <a:rPr lang="en-US" altLang="ko-KR" sz="5900" b="1" dirty="0">
                 <a:solidFill>
                   <a:srgbClr val="1F2937"/>
                 </a:solidFill>
@@ -11272,7 +11272,7 @@
               <a:buNone/>
             </a:pPr>
             <a:r>
-              <a:rPr lang="ko-KR" altLang="en-US" sz="5900" b="1" dirty="0">
+              <a:rPr lang="en-US" altLang="ko-KR" sz="5900" b="1" dirty="0">
                 <a:solidFill>
                   <a:srgbClr val="1F2937"/>
                 </a:solidFill>
@@ -11319,7 +11319,7 @@
               <a:buNone/>
             </a:pPr>
             <a:r>
-              <a:rPr lang="ko-KR" altLang="en-US" sz="5900" b="1" dirty="0">
+              <a:rPr lang="en-US" altLang="ko-KR" sz="5900" b="1" dirty="0">
                 <a:solidFill>
                   <a:srgbClr val="1F2937"/>
                 </a:solidFill>
@@ -11366,7 +11366,7 @@
               <a:buNone/>
             </a:pPr>
             <a:r>
-              <a:rPr lang="ko-KR" altLang="en-US" sz="5900" b="1" dirty="0">
+              <a:rPr lang="en-US" altLang="ko-KR" sz="5900" b="1" dirty="0">
                 <a:solidFill>
                   <a:srgbClr val="1F2937"/>
                 </a:solidFill>
@@ -11413,7 +11413,7 @@
               <a:buNone/>
             </a:pPr>
             <a:r>
-              <a:rPr lang="ko-KR" altLang="en-US" sz="5900" b="1" dirty="0">
+              <a:rPr lang="en-US" altLang="ko-KR" sz="5900" b="1" dirty="0">
                 <a:solidFill>
                   <a:srgbClr val="1F2937"/>
                 </a:solidFill>

--- a/dist/초3/영어/소리와문자/초3_영어_소리와문자_01_알파벳A부터M까지_학생용.pptx
+++ b/dist/초3/영어/소리와문자/초3_영어_소리와문자_01_알파벳A부터M까지_학생용.pptx
@@ -122,13 +122,13 @@
   <p:extLst>
     <p:ext uri="{521415D9-36F7-43E2-AB2F-B90AF26B5E84}">
       <p14:sectionLst xmlns:p14="http://schemas.microsoft.com/office/powerpoint/2010/main">
-        <p14:section name="도입" id="{11212f83-5a4f-2914-d615-d858b28b8114}">
+        <p14:section name="도입" id="{8371fbc6-e323-0594-ecd7-a1fc6d9e3ca5}">
           <p14:sldIdLst>
             <p14:sldId id="256"/>
             <p14:sldId id="257"/>
           </p14:sldIdLst>
         </p14:section>
-        <p14:section name="개념" id="{76d6de49-3420-26c7-60a7-a4459d58dda5}">
+        <p14:section name="개념" id="{1f9eb359-5fcc-7d96-24ff-e3aefeee3a91}">
           <p14:sldIdLst>
             <p14:sldId id="258"/>
             <p14:sldId id="259"/>
@@ -139,25 +139,25 @@
             <p14:sldId id="264"/>
           </p14:sldIdLst>
         </p14:section>
-        <p14:section name="연습" id="{05f338f6-c790-c99b-ef69-474df9167901}">
+        <p14:section name="연습" id="{09e24bd9-2bdf-c918-1f85-66270a177053}">
           <p14:sldIdLst>
             <p14:sldId id="265"/>
             <p14:sldId id="266"/>
             <p14:sldId id="267"/>
           </p14:sldIdLst>
         </p14:section>
-        <p14:section name="확인" id="{3eb6bd26-f93c-f9e5-1104-8bf142f1c080}">
+        <p14:section name="확인" id="{0d015b09-a3c4-76fd-be1c-df01c17a68fb}">
           <p14:sldIdLst>
             <p14:sldId id="268"/>
             <p14:sldId id="269"/>
           </p14:sldIdLst>
         </p14:section>
-        <p14:section name="정리" id="{4e6b7500-6539-4ae0-c27d-e7eb5d7808ec}">
+        <p14:section name="정리" id="{38fe4c7c-3a4c-8859-8090-d434ad017c0b}">
           <p14:sldIdLst>
             <p14:sldId id="270"/>
           </p14:sldIdLst>
         </p14:section>
-        <p14:section name="보충" id="{925a3fdc-bf51-5de5-cba0-8eeb11344ce1}">
+        <p14:section name="보충" id="{86b17fd4-5ae9-d141-1ed9-227d2ba58749}">
           <p14:sldIdLst>
             <p14:sldId id="271"/>
           </p14:sldIdLst>

--- a/dist/초3/영어/소리와문자/초3_영어_소리와문자_01_알파벳A부터M까지_학생용.pptx
+++ b/dist/초3/영어/소리와문자/초3_영어_소리와문자_01_알파벳A부터M까지_학생용.pptx
@@ -122,13 +122,13 @@
   <p:extLst>
     <p:ext uri="{521415D9-36F7-43E2-AB2F-B90AF26B5E84}">
       <p14:sectionLst xmlns:p14="http://schemas.microsoft.com/office/powerpoint/2010/main">
-        <p14:section name="도입" id="{8371fbc6-e323-0594-ecd7-a1fc6d9e3ca5}">
+        <p14:section name="도입" id="{554a9d57-90a9-0885-2fdc-68b880a403bb}">
           <p14:sldIdLst>
             <p14:sldId id="256"/>
             <p14:sldId id="257"/>
           </p14:sldIdLst>
         </p14:section>
-        <p14:section name="개념" id="{1f9eb359-5fcc-7d96-24ff-e3aefeee3a91}">
+        <p14:section name="개념" id="{7d149df6-8ec7-bdb8-7fd8-de3b4ebac55a}">
           <p14:sldIdLst>
             <p14:sldId id="258"/>
             <p14:sldId id="259"/>
@@ -139,25 +139,25 @@
             <p14:sldId id="264"/>
           </p14:sldIdLst>
         </p14:section>
-        <p14:section name="연습" id="{09e24bd9-2bdf-c918-1f85-66270a177053}">
+        <p14:section name="연습" id="{5264e3ce-551c-12b3-6d03-5233535a0b27}">
           <p14:sldIdLst>
             <p14:sldId id="265"/>
             <p14:sldId id="266"/>
             <p14:sldId id="267"/>
           </p14:sldIdLst>
         </p14:section>
-        <p14:section name="확인" id="{0d015b09-a3c4-76fd-be1c-df01c17a68fb}">
+        <p14:section name="확인" id="{ed6c172a-3b96-4424-5a77-d1e87b5426f4}">
           <p14:sldIdLst>
             <p14:sldId id="268"/>
             <p14:sldId id="269"/>
           </p14:sldIdLst>
         </p14:section>
-        <p14:section name="정리" id="{38fe4c7c-3a4c-8859-8090-d434ad017c0b}">
+        <p14:section name="정리" id="{e2bc7262-675d-7da4-dbf7-f58c14aa46ae}">
           <p14:sldIdLst>
             <p14:sldId id="270"/>
           </p14:sldIdLst>
         </p14:section>
-        <p14:section name="보충" id="{86b17fd4-5ae9-d141-1ed9-227d2ba58749}">
+        <p14:section name="보충" id="{5b60e128-175a-5f8e-ab7b-0b4041c35ecc}">
           <p14:sldIdLst>
             <p14:sldId id="271"/>
           </p14:sldIdLst>
